--- a/measurement-course/files/w03/slides.pptx
+++ b/measurement-course/files/w03/slides.pptx
@@ -123,13 +123,13 @@
   <p:extLst>
     <p:ext uri="{521415D9-36F7-43E2-AB2F-B90AF26B5E84}">
       <p14:sectionLst xmlns:p14="http://schemas.microsoft.com/office/powerpoint/2010/main">
-        <p14:section name="افتتاح" id="{dd1dd8d1-5e17-fa97-0403-f68cca7168b3}">
+        <p14:section name="افتتاح" id="{30d18f8b-191e-d188-2263-807d55abacc3}">
           <p14:sldIdLst>
             <p14:sldId id="256"/>
             <p14:sldId id="257"/>
           </p14:sldIdLst>
         </p14:section>
-        <p14:section name="المحتوى" id="{9d67d9d6-c840-d23b-879a-942b1804059c}">
+        <p14:section name="المحتوى" id="{894870dc-5860-9419-3b22-590322e6e159}">
           <p14:sldIdLst>
             <p14:sldId id="258"/>
             <p14:sldId id="259"/>
@@ -147,7 +147,7 @@
             <p14:sldId id="271"/>
           </p14:sldIdLst>
         </p14:section>
-        <p14:section name="الختام" id="{6d6ec2fd-13b0-9d1b-27c9-861306cb21aa}">
+        <p14:section name="الختام" id="{cf2fcb74-b27f-d0ee-72f5-222a908169fe}">
           <p14:sldIdLst>
             <p14:sldId id="272"/>
           </p14:sldIdLst>
@@ -11467,10 +11467,10 @@
             <a:tbl>
               <a:tblPr/>
               <a:tblGrid>
-                <a:gridCol w="2640874"/>
-                <a:gridCol w="5017661"/>
-                <a:gridCol w="1584525"/>
-                <a:gridCol w="1848612"/>
+                <a:gridCol w="2464816"/>
+                <a:gridCol w="5422595"/>
+                <a:gridCol w="1478890"/>
+                <a:gridCol w="1725371"/>
               </a:tblGrid>
               <a:tr h="502920">
                 <a:tc>
@@ -11558,7 +11558,7 @@
                           <a:ea typeface="Sakkal Majalla" pitchFamily="34" charset="-122"/>
                           <a:cs typeface="Sakkal Majalla" pitchFamily="34" charset="-120"/>
                         </a:rPr>
-                        <a:t>المقصود (تيمس 2023)</a:t>
+                        <a:t>المقصود (توزيع المعلم)</a:t>
                       </a:r>
                       <a:endParaRPr lang="en-US" sz="1900" dirty="0">
                         <a:latin typeface="Sakkal Majalla" charset="0"/>
@@ -12607,7 +12607,7 @@
                 <a:ea typeface="Sakkal Majalla" pitchFamily="34" charset="-122"/>
                 <a:cs typeface="Sakkal Majalla" pitchFamily="34" charset="-120"/>
               </a:rPr>
-              <a:t>الاستدلال كله في فقرة واحدة (الفقرة 19).</a:t>
+              <a:t>الاستدلال كله في فقرة واحدة (الفقرة 19). وللمقارنة، إطار تيمس 2023: 35% و35% و30%.</a:t>
             </a:r>
             <a:endParaRPr lang="en-US" sz="1700" dirty="0"/>
           </a:p>
